--- a/ER - 02-10-26 - MPC - AOP2 (Marcelo)(5335).pptx
+++ b/ER - 02-10-26 - MPC - AOP2 (Marcelo)(5335).pptx
@@ -876,7 +876,7 @@
           </a:ln>
           <a:extLst>
             <a:ext uri="{C572A759-6A51-4108-AA02-DFA0A04FC94B}">
-              <ma14:wrappingTextBoxFlag xmlns:ma14="http://schemas.microsoft.com/office/mac/drawingml/2011/main" xmlns="" val="1"/>
+              <ma14:wrappingTextBoxFlag xmlns="" xmlns:ma14="http://schemas.microsoft.com/office/mac/drawingml/2011/main" val="1"/>
             </a:ext>
           </a:extLst>
         </p:spPr>
@@ -1048,7 +1048,7 @@
           </a:ln>
           <a:extLst>
             <a:ext uri="{C572A759-6A51-4108-AA02-DFA0A04FC94B}">
-              <ma14:wrappingTextBoxFlag xmlns:ma14="http://schemas.microsoft.com/office/mac/drawingml/2011/main" xmlns="" val="1"/>
+              <ma14:wrappingTextBoxFlag xmlns="" xmlns:ma14="http://schemas.microsoft.com/office/mac/drawingml/2011/main" val="1"/>
             </a:ext>
           </a:extLst>
         </p:spPr>
@@ -1137,7 +1137,7 @@
           </a:ln>
           <a:extLst>
             <a:ext uri="{C572A759-6A51-4108-AA02-DFA0A04FC94B}">
-              <ma14:wrappingTextBoxFlag xmlns:ma14="http://schemas.microsoft.com/office/mac/drawingml/2011/main" xmlns="" val="1"/>
+              <ma14:wrappingTextBoxFlag xmlns="" xmlns:ma14="http://schemas.microsoft.com/office/mac/drawingml/2011/main" val="1"/>
             </a:ext>
           </a:extLst>
         </p:spPr>
@@ -1301,7 +1301,7 @@
           </a:ln>
           <a:extLst>
             <a:ext uri="{C572A759-6A51-4108-AA02-DFA0A04FC94B}">
-              <ma14:wrappingTextBoxFlag xmlns:ma14="http://schemas.microsoft.com/office/mac/drawingml/2011/main" xmlns="" val="1"/>
+              <ma14:wrappingTextBoxFlag xmlns="" xmlns:ma14="http://schemas.microsoft.com/office/mac/drawingml/2011/main" val="1"/>
             </a:ext>
           </a:extLst>
         </p:spPr>
@@ -1390,7 +1390,7 @@
           </a:ln>
           <a:extLst>
             <a:ext uri="{C572A759-6A51-4108-AA02-DFA0A04FC94B}">
-              <ma14:wrappingTextBoxFlag xmlns:ma14="http://schemas.microsoft.com/office/mac/drawingml/2011/main" xmlns="" val="1"/>
+              <ma14:wrappingTextBoxFlag xmlns="" xmlns:ma14="http://schemas.microsoft.com/office/mac/drawingml/2011/main" val="1"/>
             </a:ext>
           </a:extLst>
         </p:spPr>
@@ -1479,7 +1479,7 @@
           </a:ln>
           <a:extLst>
             <a:ext uri="{C572A759-6A51-4108-AA02-DFA0A04FC94B}">
-              <ma14:wrappingTextBoxFlag xmlns:ma14="http://schemas.microsoft.com/office/mac/drawingml/2011/main" xmlns="" val="1"/>
+              <ma14:wrappingTextBoxFlag xmlns="" xmlns:ma14="http://schemas.microsoft.com/office/mac/drawingml/2011/main" val="1"/>
             </a:ext>
           </a:extLst>
         </p:spPr>
@@ -1643,7 +1643,7 @@
           </a:ln>
           <a:extLst>
             <a:ext uri="{C572A759-6A51-4108-AA02-DFA0A04FC94B}">
-              <ma14:wrappingTextBoxFlag xmlns:ma14="http://schemas.microsoft.com/office/mac/drawingml/2011/main" xmlns="" val="1"/>
+              <ma14:wrappingTextBoxFlag xmlns="" xmlns:ma14="http://schemas.microsoft.com/office/mac/drawingml/2011/main" val="1"/>
             </a:ext>
           </a:extLst>
         </p:spPr>
@@ -1732,7 +1732,7 @@
           </a:ln>
           <a:extLst>
             <a:ext uri="{C572A759-6A51-4108-AA02-DFA0A04FC94B}">
-              <ma14:wrappingTextBoxFlag xmlns:ma14="http://schemas.microsoft.com/office/mac/drawingml/2011/main" xmlns="" val="1"/>
+              <ma14:wrappingTextBoxFlag xmlns="" xmlns:ma14="http://schemas.microsoft.com/office/mac/drawingml/2011/main" val="1"/>
             </a:ext>
           </a:extLst>
         </p:spPr>
@@ -1821,7 +1821,7 @@
           </a:ln>
           <a:extLst>
             <a:ext uri="{C572A759-6A51-4108-AA02-DFA0A04FC94B}">
-              <ma14:wrappingTextBoxFlag xmlns:ma14="http://schemas.microsoft.com/office/mac/drawingml/2011/main" xmlns="" val="1"/>
+              <ma14:wrappingTextBoxFlag xmlns="" xmlns:ma14="http://schemas.microsoft.com/office/mac/drawingml/2011/main" val="1"/>
             </a:ext>
           </a:extLst>
         </p:spPr>
@@ -1941,7 +1941,7 @@
           </a:ln>
           <a:extLst>
             <a:ext uri="{C572A759-6A51-4108-AA02-DFA0A04FC94B}">
-              <ma14:wrappingTextBoxFlag xmlns:ma14="http://schemas.microsoft.com/office/mac/drawingml/2011/main" xmlns="" val="1"/>
+              <ma14:wrappingTextBoxFlag xmlns="" xmlns:ma14="http://schemas.microsoft.com/office/mac/drawingml/2011/main" val="1"/>
             </a:ext>
           </a:extLst>
         </p:spPr>
@@ -2030,7 +2030,7 @@
           </a:ln>
           <a:extLst>
             <a:ext uri="{C572A759-6A51-4108-AA02-DFA0A04FC94B}">
-              <ma14:wrappingTextBoxFlag xmlns:ma14="http://schemas.microsoft.com/office/mac/drawingml/2011/main" xmlns="" val="1"/>
+              <ma14:wrappingTextBoxFlag xmlns="" xmlns:ma14="http://schemas.microsoft.com/office/mac/drawingml/2011/main" val="1"/>
             </a:ext>
           </a:extLst>
         </p:spPr>
@@ -2119,7 +2119,7 @@
           </a:ln>
           <a:extLst>
             <a:ext uri="{C572A759-6A51-4108-AA02-DFA0A04FC94B}">
-              <ma14:wrappingTextBoxFlag xmlns:ma14="http://schemas.microsoft.com/office/mac/drawingml/2011/main" xmlns="" val="1"/>
+              <ma14:wrappingTextBoxFlag xmlns="" xmlns:ma14="http://schemas.microsoft.com/office/mac/drawingml/2011/main" val="1"/>
             </a:ext>
           </a:extLst>
         </p:spPr>
@@ -2283,7 +2283,7 @@
           </a:ln>
           <a:extLst>
             <a:ext uri="{C572A759-6A51-4108-AA02-DFA0A04FC94B}">
-              <ma14:wrappingTextBoxFlag xmlns:ma14="http://schemas.microsoft.com/office/mac/drawingml/2011/main" xmlns="" val="1"/>
+              <ma14:wrappingTextBoxFlag xmlns="" xmlns:ma14="http://schemas.microsoft.com/office/mac/drawingml/2011/main" val="1"/>
             </a:ext>
           </a:extLst>
         </p:spPr>
@@ -2372,7 +2372,7 @@
           </a:ln>
           <a:extLst>
             <a:ext uri="{C572A759-6A51-4108-AA02-DFA0A04FC94B}">
-              <ma14:wrappingTextBoxFlag xmlns:ma14="http://schemas.microsoft.com/office/mac/drawingml/2011/main" xmlns="" val="1"/>
+              <ma14:wrappingTextBoxFlag xmlns="" xmlns:ma14="http://schemas.microsoft.com/office/mac/drawingml/2011/main" val="1"/>
             </a:ext>
           </a:extLst>
         </p:spPr>
@@ -2461,7 +2461,7 @@
           </a:ln>
           <a:extLst>
             <a:ext uri="{C572A759-6A51-4108-AA02-DFA0A04FC94B}">
-              <ma14:wrappingTextBoxFlag xmlns:ma14="http://schemas.microsoft.com/office/mac/drawingml/2011/main" xmlns="" val="1"/>
+              <ma14:wrappingTextBoxFlag xmlns="" xmlns:ma14="http://schemas.microsoft.com/office/mac/drawingml/2011/main" val="1"/>
             </a:ext>
           </a:extLst>
         </p:spPr>
@@ -2581,7 +2581,7 @@
           </a:ln>
           <a:extLst>
             <a:ext uri="{C572A759-6A51-4108-AA02-DFA0A04FC94B}">
-              <ma14:wrappingTextBoxFlag xmlns:ma14="http://schemas.microsoft.com/office/mac/drawingml/2011/main" xmlns="" val="1"/>
+              <ma14:wrappingTextBoxFlag xmlns="" xmlns:ma14="http://schemas.microsoft.com/office/mac/drawingml/2011/main" val="1"/>
             </a:ext>
           </a:extLst>
         </p:spPr>
@@ -2670,7 +2670,7 @@
           </a:ln>
           <a:extLst>
             <a:ext uri="{C572A759-6A51-4108-AA02-DFA0A04FC94B}">
-              <ma14:wrappingTextBoxFlag xmlns:ma14="http://schemas.microsoft.com/office/mac/drawingml/2011/main" xmlns="" val="1"/>
+              <ma14:wrappingTextBoxFlag xmlns="" xmlns:ma14="http://schemas.microsoft.com/office/mac/drawingml/2011/main" val="1"/>
             </a:ext>
           </a:extLst>
         </p:spPr>
@@ -2759,7 +2759,7 @@
           </a:ln>
           <a:extLst>
             <a:ext uri="{C572A759-6A51-4108-AA02-DFA0A04FC94B}">
-              <ma14:wrappingTextBoxFlag xmlns:ma14="http://schemas.microsoft.com/office/mac/drawingml/2011/main" xmlns="" val="1"/>
+              <ma14:wrappingTextBoxFlag xmlns="" xmlns:ma14="http://schemas.microsoft.com/office/mac/drawingml/2011/main" val="1"/>
             </a:ext>
           </a:extLst>
         </p:spPr>
@@ -2848,7 +2848,7 @@
           </a:ln>
           <a:extLst>
             <a:ext uri="{C572A759-6A51-4108-AA02-DFA0A04FC94B}">
-              <ma14:wrappingTextBoxFlag xmlns:ma14="http://schemas.microsoft.com/office/mac/drawingml/2011/main" xmlns="" val="1"/>
+              <ma14:wrappingTextBoxFlag xmlns="" xmlns:ma14="http://schemas.microsoft.com/office/mac/drawingml/2011/main" val="1"/>
             </a:ext>
           </a:extLst>
         </p:spPr>
@@ -3012,7 +3012,7 @@
           </a:ln>
           <a:extLst>
             <a:ext uri="{C572A759-6A51-4108-AA02-DFA0A04FC94B}">
-              <ma14:wrappingTextBoxFlag xmlns:ma14="http://schemas.microsoft.com/office/mac/drawingml/2011/main" xmlns="" val="1"/>
+              <ma14:wrappingTextBoxFlag xmlns="" xmlns:ma14="http://schemas.microsoft.com/office/mac/drawingml/2011/main" val="1"/>
             </a:ext>
           </a:extLst>
         </p:spPr>
@@ -3101,7 +3101,7 @@
           </a:ln>
           <a:extLst>
             <a:ext uri="{C572A759-6A51-4108-AA02-DFA0A04FC94B}">
-              <ma14:wrappingTextBoxFlag xmlns:ma14="http://schemas.microsoft.com/office/mac/drawingml/2011/main" xmlns="" val="1"/>
+              <ma14:wrappingTextBoxFlag xmlns="" xmlns:ma14="http://schemas.microsoft.com/office/mac/drawingml/2011/main" val="1"/>
             </a:ext>
           </a:extLst>
         </p:spPr>
@@ -3190,7 +3190,7 @@
           </a:ln>
           <a:extLst>
             <a:ext uri="{C572A759-6A51-4108-AA02-DFA0A04FC94B}">
-              <ma14:wrappingTextBoxFlag xmlns:ma14="http://schemas.microsoft.com/office/mac/drawingml/2011/main" xmlns="" val="1"/>
+              <ma14:wrappingTextBoxFlag xmlns="" xmlns:ma14="http://schemas.microsoft.com/office/mac/drawingml/2011/main" val="1"/>
             </a:ext>
           </a:extLst>
         </p:spPr>
@@ -3279,7 +3279,7 @@
           </a:ln>
           <a:extLst>
             <a:ext uri="{C572A759-6A51-4108-AA02-DFA0A04FC94B}">
-              <ma14:wrappingTextBoxFlag xmlns:ma14="http://schemas.microsoft.com/office/mac/drawingml/2011/main" xmlns="" val="1"/>
+              <ma14:wrappingTextBoxFlag xmlns="" xmlns:ma14="http://schemas.microsoft.com/office/mac/drawingml/2011/main" val="1"/>
             </a:ext>
           </a:extLst>
         </p:spPr>
@@ -4179,7 +4179,7 @@
           </a:ln>
           <a:extLst>
             <a:ext uri="{C572A759-6A51-4108-AA02-DFA0A04FC94B}">
-              <ma14:wrappingTextBoxFlag xmlns:ma14="http://schemas.microsoft.com/office/mac/drawingml/2011/main" xmlns="" val="1"/>
+              <ma14:wrappingTextBoxFlag xmlns="" xmlns:ma14="http://schemas.microsoft.com/office/mac/drawingml/2011/main" val="1"/>
             </a:ext>
           </a:extLst>
         </p:spPr>
@@ -4555,7 +4555,7 @@
           </a:ln>
           <a:extLst>
             <a:ext uri="{C572A759-6A51-4108-AA02-DFA0A04FC94B}">
-              <ma14:wrappingTextBoxFlag xmlns:ma14="http://schemas.microsoft.com/office/mac/drawingml/2011/main" xmlns="" val="1"/>
+              <ma14:wrappingTextBoxFlag xmlns="" xmlns:ma14="http://schemas.microsoft.com/office/mac/drawingml/2011/main" val="1"/>
             </a:ext>
           </a:extLst>
         </p:spPr>
@@ -4887,7 +4887,7 @@
           </a:ln>
           <a:extLst>
             <a:ext uri="{C572A759-6A51-4108-AA02-DFA0A04FC94B}">
-              <ma14:wrappingTextBoxFlag xmlns:ma14="http://schemas.microsoft.com/office/mac/drawingml/2011/main" xmlns="" val="1"/>
+              <ma14:wrappingTextBoxFlag xmlns="" xmlns:ma14="http://schemas.microsoft.com/office/mac/drawingml/2011/main" val="1"/>
             </a:ext>
           </a:extLst>
         </p:spPr>
@@ -4992,7 +4992,7 @@
           </a:ln>
           <a:extLst>
             <a:ext uri="{C572A759-6A51-4108-AA02-DFA0A04FC94B}">
-              <ma14:wrappingTextBoxFlag xmlns:ma14="http://schemas.microsoft.com/office/mac/drawingml/2011/main" xmlns="" val="1"/>
+              <ma14:wrappingTextBoxFlag xmlns="" xmlns:ma14="http://schemas.microsoft.com/office/mac/drawingml/2011/main" val="1"/>
             </a:ext>
           </a:extLst>
         </p:spPr>
@@ -5097,7 +5097,7 @@
           </a:ln>
           <a:extLst>
             <a:ext uri="{C572A759-6A51-4108-AA02-DFA0A04FC94B}">
-              <ma14:wrappingTextBoxFlag xmlns:ma14="http://schemas.microsoft.com/office/mac/drawingml/2011/main" xmlns="" val="1"/>
+              <ma14:wrappingTextBoxFlag xmlns="" xmlns:ma14="http://schemas.microsoft.com/office/mac/drawingml/2011/main" val="1"/>
             </a:ext>
           </a:extLst>
         </p:spPr>
@@ -5277,7 +5277,7 @@
           </a:ln>
           <a:extLst>
             <a:ext uri="{C572A759-6A51-4108-AA02-DFA0A04FC94B}">
-              <ma14:wrappingTextBoxFlag xmlns:ma14="http://schemas.microsoft.com/office/mac/drawingml/2011/main" xmlns="" val="1"/>
+              <ma14:wrappingTextBoxFlag xmlns="" xmlns:ma14="http://schemas.microsoft.com/office/mac/drawingml/2011/main" val="1"/>
             </a:ext>
           </a:extLst>
         </p:spPr>
@@ -5593,7 +5593,7 @@
           </a:ln>
           <a:extLst>
             <a:ext uri="{C572A759-6A51-4108-AA02-DFA0A04FC94B}">
-              <ma14:wrappingTextBoxFlag xmlns:ma14="http://schemas.microsoft.com/office/mac/drawingml/2011/main" xmlns="" val="1"/>
+              <ma14:wrappingTextBoxFlag xmlns="" xmlns:ma14="http://schemas.microsoft.com/office/mac/drawingml/2011/main" val="1"/>
             </a:ext>
           </a:extLst>
         </p:spPr>
@@ -5682,7 +5682,7 @@
           </a:ln>
           <a:extLst>
             <a:ext uri="{C572A759-6A51-4108-AA02-DFA0A04FC94B}">
-              <ma14:wrappingTextBoxFlag xmlns:ma14="http://schemas.microsoft.com/office/mac/drawingml/2011/main" xmlns="" val="1"/>
+              <ma14:wrappingTextBoxFlag xmlns="" xmlns:ma14="http://schemas.microsoft.com/office/mac/drawingml/2011/main" val="1"/>
             </a:ext>
           </a:extLst>
         </p:spPr>
@@ -5771,7 +5771,7 @@
           </a:ln>
           <a:extLst>
             <a:ext uri="{C572A759-6A51-4108-AA02-DFA0A04FC94B}">
-              <ma14:wrappingTextBoxFlag xmlns:ma14="http://schemas.microsoft.com/office/mac/drawingml/2011/main" xmlns="" val="1"/>
+              <ma14:wrappingTextBoxFlag xmlns="" xmlns:ma14="http://schemas.microsoft.com/office/mac/drawingml/2011/main" val="1"/>
             </a:ext>
           </a:extLst>
         </p:spPr>
@@ -5860,7 +5860,7 @@
           </a:ln>
           <a:extLst>
             <a:ext uri="{C572A759-6A51-4108-AA02-DFA0A04FC94B}">
-              <ma14:wrappingTextBoxFlag xmlns:ma14="http://schemas.microsoft.com/office/mac/drawingml/2011/main" xmlns="" val="1"/>
+              <ma14:wrappingTextBoxFlag xmlns="" xmlns:ma14="http://schemas.microsoft.com/office/mac/drawingml/2011/main" val="1"/>
             </a:ext>
           </a:extLst>
         </p:spPr>
@@ -5949,7 +5949,7 @@
           </a:ln>
           <a:extLst>
             <a:ext uri="{C572A759-6A51-4108-AA02-DFA0A04FC94B}">
-              <ma14:wrappingTextBoxFlag xmlns:ma14="http://schemas.microsoft.com/office/mac/drawingml/2011/main" xmlns="" val="1"/>
+              <ma14:wrappingTextBoxFlag xmlns="" xmlns:ma14="http://schemas.microsoft.com/office/mac/drawingml/2011/main" val="1"/>
             </a:ext>
           </a:extLst>
         </p:spPr>
@@ -6038,7 +6038,7 @@
           </a:ln>
           <a:extLst>
             <a:ext uri="{C572A759-6A51-4108-AA02-DFA0A04FC94B}">
-              <ma14:wrappingTextBoxFlag xmlns:ma14="http://schemas.microsoft.com/office/mac/drawingml/2011/main" xmlns="" val="1"/>
+              <ma14:wrappingTextBoxFlag xmlns="" xmlns:ma14="http://schemas.microsoft.com/office/mac/drawingml/2011/main" val="1"/>
             </a:ext>
           </a:extLst>
         </p:spPr>
@@ -6127,7 +6127,7 @@
           </a:ln>
           <a:extLst>
             <a:ext uri="{C572A759-6A51-4108-AA02-DFA0A04FC94B}">
-              <ma14:wrappingTextBoxFlag xmlns:ma14="http://schemas.microsoft.com/office/mac/drawingml/2011/main" xmlns="" val="1"/>
+              <ma14:wrappingTextBoxFlag xmlns="" xmlns:ma14="http://schemas.microsoft.com/office/mac/drawingml/2011/main" val="1"/>
             </a:ext>
           </a:extLst>
         </p:spPr>
@@ -6216,7 +6216,7 @@
           </a:ln>
           <a:extLst>
             <a:ext uri="{C572A759-6A51-4108-AA02-DFA0A04FC94B}">
-              <ma14:wrappingTextBoxFlag xmlns:ma14="http://schemas.microsoft.com/office/mac/drawingml/2011/main" xmlns="" val="1"/>
+              <ma14:wrappingTextBoxFlag xmlns="" xmlns:ma14="http://schemas.microsoft.com/office/mac/drawingml/2011/main" val="1"/>
             </a:ext>
           </a:extLst>
         </p:spPr>
@@ -6548,7 +6548,7 @@
           </a:ln>
           <a:extLst>
             <a:ext uri="{C572A759-6A51-4108-AA02-DFA0A04FC94B}">
-              <ma14:wrappingTextBoxFlag xmlns:ma14="http://schemas.microsoft.com/office/mac/drawingml/2011/main" xmlns="" val="1"/>
+              <ma14:wrappingTextBoxFlag xmlns="" xmlns:ma14="http://schemas.microsoft.com/office/mac/drawingml/2011/main" val="1"/>
             </a:ext>
           </a:extLst>
         </p:spPr>
@@ -6653,7 +6653,7 @@
           </a:ln>
           <a:extLst>
             <a:ext uri="{C572A759-6A51-4108-AA02-DFA0A04FC94B}">
-              <ma14:wrappingTextBoxFlag xmlns:ma14="http://schemas.microsoft.com/office/mac/drawingml/2011/main" xmlns="" val="1"/>
+              <ma14:wrappingTextBoxFlag xmlns="" xmlns:ma14="http://schemas.microsoft.com/office/mac/drawingml/2011/main" val="1"/>
             </a:ext>
           </a:extLst>
         </p:spPr>
@@ -6758,7 +6758,7 @@
           </a:ln>
           <a:extLst>
             <a:ext uri="{C572A759-6A51-4108-AA02-DFA0A04FC94B}">
-              <ma14:wrappingTextBoxFlag xmlns:ma14="http://schemas.microsoft.com/office/mac/drawingml/2011/main" xmlns="" val="1"/>
+              <ma14:wrappingTextBoxFlag xmlns="" xmlns:ma14="http://schemas.microsoft.com/office/mac/drawingml/2011/main" val="1"/>
             </a:ext>
           </a:extLst>
         </p:spPr>
@@ -6863,7 +6863,7 @@
           </a:ln>
           <a:extLst>
             <a:ext uri="{C572A759-6A51-4108-AA02-DFA0A04FC94B}">
-              <ma14:wrappingTextBoxFlag xmlns:ma14="http://schemas.microsoft.com/office/mac/drawingml/2011/main" xmlns="" val="1"/>
+              <ma14:wrappingTextBoxFlag xmlns="" xmlns:ma14="http://schemas.microsoft.com/office/mac/drawingml/2011/main" val="1"/>
             </a:ext>
           </a:extLst>
         </p:spPr>
@@ -7179,7 +7179,7 @@
           </a:ln>
           <a:extLst>
             <a:ext uri="{C572A759-6A51-4108-AA02-DFA0A04FC94B}">
-              <ma14:wrappingTextBoxFlag xmlns:ma14="http://schemas.microsoft.com/office/mac/drawingml/2011/main" xmlns="" val="1"/>
+              <ma14:wrappingTextBoxFlag xmlns="" xmlns:ma14="http://schemas.microsoft.com/office/mac/drawingml/2011/main" val="1"/>
             </a:ext>
           </a:extLst>
         </p:spPr>
@@ -7495,7 +7495,7 @@
           </a:ln>
           <a:extLst>
             <a:ext uri="{C572A759-6A51-4108-AA02-DFA0A04FC94B}">
-              <ma14:wrappingTextBoxFlag xmlns:ma14="http://schemas.microsoft.com/office/mac/drawingml/2011/main" xmlns="" val="1"/>
+              <ma14:wrappingTextBoxFlag xmlns="" xmlns:ma14="http://schemas.microsoft.com/office/mac/drawingml/2011/main" val="1"/>
             </a:ext>
           </a:extLst>
         </p:spPr>
@@ -7584,7 +7584,7 @@
           </a:ln>
           <a:extLst>
             <a:ext uri="{C572A759-6A51-4108-AA02-DFA0A04FC94B}">
-              <ma14:wrappingTextBoxFlag xmlns:ma14="http://schemas.microsoft.com/office/mac/drawingml/2011/main" xmlns="" val="1"/>
+              <ma14:wrappingTextBoxFlag xmlns="" xmlns:ma14="http://schemas.microsoft.com/office/mac/drawingml/2011/main" val="1"/>
             </a:ext>
           </a:extLst>
         </p:spPr>
@@ -7900,7 +7900,7 @@
           </a:ln>
           <a:extLst>
             <a:ext uri="{C572A759-6A51-4108-AA02-DFA0A04FC94B}">
-              <ma14:wrappingTextBoxFlag xmlns:ma14="http://schemas.microsoft.com/office/mac/drawingml/2011/main" xmlns="" val="1"/>
+              <ma14:wrappingTextBoxFlag xmlns="" xmlns:ma14="http://schemas.microsoft.com/office/mac/drawingml/2011/main" val="1"/>
             </a:ext>
           </a:extLst>
         </p:spPr>
@@ -8046,7 +8046,7 @@
           </a:ln>
           <a:extLst>
             <a:ext uri="{C572A759-6A51-4108-AA02-DFA0A04FC94B}">
-              <ma14:wrappingTextBoxFlag xmlns:ma14="http://schemas.microsoft.com/office/mac/drawingml/2011/main" xmlns="" val="1"/>
+              <ma14:wrappingTextBoxFlag xmlns="" xmlns:ma14="http://schemas.microsoft.com/office/mac/drawingml/2011/main" val="1"/>
             </a:ext>
           </a:extLst>
         </p:spPr>
@@ -8432,7 +8432,7 @@
           </a:ln>
           <a:extLst>
             <a:ext uri="{C572A759-6A51-4108-AA02-DFA0A04FC94B}">
-              <ma14:wrappingTextBoxFlag xmlns:ma14="http://schemas.microsoft.com/office/mac/drawingml/2011/main" xmlns="" val="1"/>
+              <ma14:wrappingTextBoxFlag xmlns="" xmlns:ma14="http://schemas.microsoft.com/office/mac/drawingml/2011/main" val="1"/>
             </a:ext>
           </a:extLst>
         </p:spPr>
@@ -8622,7 +8622,7 @@
           </a:ln>
           <a:extLst>
             <a:ext uri="{C572A759-6A51-4108-AA02-DFA0A04FC94B}">
-              <ma14:wrappingTextBoxFlag xmlns:ma14="http://schemas.microsoft.com/office/mac/drawingml/2011/main" xmlns="" val="1"/>
+              <ma14:wrappingTextBoxFlag xmlns="" xmlns:ma14="http://schemas.microsoft.com/office/mac/drawingml/2011/main" val="1"/>
             </a:ext>
           </a:extLst>
         </p:spPr>
@@ -8742,7 +8742,7 @@
           </a:ln>
           <a:extLst>
             <a:ext uri="{C572A759-6A51-4108-AA02-DFA0A04FC94B}">
-              <ma14:wrappingTextBoxFlag xmlns:ma14="http://schemas.microsoft.com/office/mac/drawingml/2011/main" xmlns="" val="1"/>
+              <ma14:wrappingTextBoxFlag xmlns="" xmlns:ma14="http://schemas.microsoft.com/office/mac/drawingml/2011/main" val="1"/>
             </a:ext>
           </a:extLst>
         </p:spPr>
@@ -8950,7 +8950,7 @@
           </a:ln>
           <a:extLst>
             <a:ext uri="{C572A759-6A51-4108-AA02-DFA0A04FC94B}">
-              <ma14:wrappingTextBoxFlag xmlns:ma14="http://schemas.microsoft.com/office/mac/drawingml/2011/main" xmlns="" val="1"/>
+              <ma14:wrappingTextBoxFlag xmlns="" xmlns:ma14="http://schemas.microsoft.com/office/mac/drawingml/2011/main" val="1"/>
             </a:ext>
           </a:extLst>
         </p:spPr>
@@ -9039,7 +9039,7 @@
           </a:ln>
           <a:extLst>
             <a:ext uri="{C572A759-6A51-4108-AA02-DFA0A04FC94B}">
-              <ma14:wrappingTextBoxFlag xmlns:ma14="http://schemas.microsoft.com/office/mac/drawingml/2011/main" xmlns="" val="1"/>
+              <ma14:wrappingTextBoxFlag xmlns="" xmlns:ma14="http://schemas.microsoft.com/office/mac/drawingml/2011/main" val="1"/>
             </a:ext>
           </a:extLst>
         </p:spPr>
@@ -9128,7 +9128,7 @@
           </a:ln>
           <a:extLst>
             <a:ext uri="{C572A759-6A51-4108-AA02-DFA0A04FC94B}">
-              <ma14:wrappingTextBoxFlag xmlns:ma14="http://schemas.microsoft.com/office/mac/drawingml/2011/main" xmlns="" val="1"/>
+              <ma14:wrappingTextBoxFlag xmlns="" xmlns:ma14="http://schemas.microsoft.com/office/mac/drawingml/2011/main" val="1"/>
             </a:ext>
           </a:extLst>
         </p:spPr>
@@ -9217,7 +9217,7 @@
           </a:ln>
           <a:extLst>
             <a:ext uri="{C572A759-6A51-4108-AA02-DFA0A04FC94B}">
-              <ma14:wrappingTextBoxFlag xmlns:ma14="http://schemas.microsoft.com/office/mac/drawingml/2011/main" xmlns="" val="1"/>
+              <ma14:wrappingTextBoxFlag xmlns="" xmlns:ma14="http://schemas.microsoft.com/office/mac/drawingml/2011/main" val="1"/>
             </a:ext>
           </a:extLst>
         </p:spPr>
@@ -9306,7 +9306,7 @@
           </a:ln>
           <a:extLst>
             <a:ext uri="{C572A759-6A51-4108-AA02-DFA0A04FC94B}">
-              <ma14:wrappingTextBoxFlag xmlns:ma14="http://schemas.microsoft.com/office/mac/drawingml/2011/main" xmlns="" val="1"/>
+              <ma14:wrappingTextBoxFlag xmlns="" xmlns:ma14="http://schemas.microsoft.com/office/mac/drawingml/2011/main" val="1"/>
             </a:ext>
           </a:extLst>
         </p:spPr>
@@ -9395,7 +9395,7 @@
           </a:ln>
           <a:extLst>
             <a:ext uri="{C572A759-6A51-4108-AA02-DFA0A04FC94B}">
-              <ma14:wrappingTextBoxFlag xmlns:ma14="http://schemas.microsoft.com/office/mac/drawingml/2011/main" xmlns="" val="1"/>
+              <ma14:wrappingTextBoxFlag xmlns="" xmlns:ma14="http://schemas.microsoft.com/office/mac/drawingml/2011/main" val="1"/>
             </a:ext>
           </a:extLst>
         </p:spPr>
@@ -9515,7 +9515,7 @@
           </a:ln>
           <a:extLst>
             <a:ext uri="{C572A759-6A51-4108-AA02-DFA0A04FC94B}">
-              <ma14:wrappingTextBoxFlag xmlns:ma14="http://schemas.microsoft.com/office/mac/drawingml/2011/main" xmlns="" val="1"/>
+              <ma14:wrappingTextBoxFlag xmlns="" xmlns:ma14="http://schemas.microsoft.com/office/mac/drawingml/2011/main" val="1"/>
             </a:ext>
           </a:extLst>
         </p:spPr>
@@ -9679,7 +9679,7 @@
           </a:ln>
           <a:extLst>
             <a:ext uri="{C572A759-6A51-4108-AA02-DFA0A04FC94B}">
-              <ma14:wrappingTextBoxFlag xmlns:ma14="http://schemas.microsoft.com/office/mac/drawingml/2011/main" xmlns="" val="1"/>
+              <ma14:wrappingTextBoxFlag xmlns="" xmlns:ma14="http://schemas.microsoft.com/office/mac/drawingml/2011/main" val="1"/>
             </a:ext>
           </a:extLst>
         </p:spPr>
@@ -9768,7 +9768,7 @@
           </a:ln>
           <a:extLst>
             <a:ext uri="{C572A759-6A51-4108-AA02-DFA0A04FC94B}">
-              <ma14:wrappingTextBoxFlag xmlns:ma14="http://schemas.microsoft.com/office/mac/drawingml/2011/main" xmlns="" val="1"/>
+              <ma14:wrappingTextBoxFlag xmlns="" xmlns:ma14="http://schemas.microsoft.com/office/mac/drawingml/2011/main" val="1"/>
             </a:ext>
           </a:extLst>
         </p:spPr>
@@ -9857,7 +9857,7 @@
           </a:ln>
           <a:extLst>
             <a:ext uri="{C572A759-6A51-4108-AA02-DFA0A04FC94B}">
-              <ma14:wrappingTextBoxFlag xmlns:ma14="http://schemas.microsoft.com/office/mac/drawingml/2011/main" xmlns="" val="1"/>
+              <ma14:wrappingTextBoxFlag xmlns="" xmlns:ma14="http://schemas.microsoft.com/office/mac/drawingml/2011/main" val="1"/>
             </a:ext>
           </a:extLst>
         </p:spPr>
@@ -10021,7 +10021,7 @@
           </a:ln>
           <a:extLst>
             <a:ext uri="{C572A759-6A51-4108-AA02-DFA0A04FC94B}">
-              <ma14:wrappingTextBoxFlag xmlns:ma14="http://schemas.microsoft.com/office/mac/drawingml/2011/main" xmlns="" val="1"/>
+              <ma14:wrappingTextBoxFlag xmlns="" xmlns:ma14="http://schemas.microsoft.com/office/mac/drawingml/2011/main" val="1"/>
             </a:ext>
           </a:extLst>
         </p:spPr>
@@ -10110,7 +10110,7 @@
           </a:ln>
           <a:extLst>
             <a:ext uri="{C572A759-6A51-4108-AA02-DFA0A04FC94B}">
-              <ma14:wrappingTextBoxFlag xmlns:ma14="http://schemas.microsoft.com/office/mac/drawingml/2011/main" xmlns="" val="1"/>
+              <ma14:wrappingTextBoxFlag xmlns="" xmlns:ma14="http://schemas.microsoft.com/office/mac/drawingml/2011/main" val="1"/>
             </a:ext>
           </a:extLst>
         </p:spPr>
@@ -10199,7 +10199,7 @@
           </a:ln>
           <a:extLst>
             <a:ext uri="{C572A759-6A51-4108-AA02-DFA0A04FC94B}">
-              <ma14:wrappingTextBoxFlag xmlns:ma14="http://schemas.microsoft.com/office/mac/drawingml/2011/main" xmlns="" val="1"/>
+              <ma14:wrappingTextBoxFlag xmlns="" xmlns:ma14="http://schemas.microsoft.com/office/mac/drawingml/2011/main" val="1"/>
             </a:ext>
           </a:extLst>
         </p:spPr>
@@ -10288,7 +10288,7 @@
           </a:ln>
           <a:extLst>
             <a:ext uri="{C572A759-6A51-4108-AA02-DFA0A04FC94B}">
-              <ma14:wrappingTextBoxFlag xmlns:ma14="http://schemas.microsoft.com/office/mac/drawingml/2011/main" xmlns="" val="1"/>
+              <ma14:wrappingTextBoxFlag xmlns="" xmlns:ma14="http://schemas.microsoft.com/office/mac/drawingml/2011/main" val="1"/>
             </a:ext>
           </a:extLst>
         </p:spPr>
@@ -10377,7 +10377,7 @@
           </a:ln>
           <a:extLst>
             <a:ext uri="{C572A759-6A51-4108-AA02-DFA0A04FC94B}">
-              <ma14:wrappingTextBoxFlag xmlns:ma14="http://schemas.microsoft.com/office/mac/drawingml/2011/main" xmlns="" val="1"/>
+              <ma14:wrappingTextBoxFlag xmlns="" xmlns:ma14="http://schemas.microsoft.com/office/mac/drawingml/2011/main" val="1"/>
             </a:ext>
           </a:extLst>
         </p:spPr>
@@ -10541,7 +10541,7 @@
           </a:ln>
           <a:extLst>
             <a:ext uri="{C572A759-6A51-4108-AA02-DFA0A04FC94B}">
-              <ma14:wrappingTextBoxFlag xmlns:ma14="http://schemas.microsoft.com/office/mac/drawingml/2011/main" xmlns="" val="1"/>
+              <ma14:wrappingTextBoxFlag xmlns="" xmlns:ma14="http://schemas.microsoft.com/office/mac/drawingml/2011/main" val="1"/>
             </a:ext>
           </a:extLst>
         </p:spPr>
@@ -10630,7 +10630,7 @@
           </a:ln>
           <a:extLst>
             <a:ext uri="{C572A759-6A51-4108-AA02-DFA0A04FC94B}">
-              <ma14:wrappingTextBoxFlag xmlns:ma14="http://schemas.microsoft.com/office/mac/drawingml/2011/main" xmlns="" val="1"/>
+              <ma14:wrappingTextBoxFlag xmlns="" xmlns:ma14="http://schemas.microsoft.com/office/mac/drawingml/2011/main" val="1"/>
             </a:ext>
           </a:extLst>
         </p:spPr>
@@ -10719,7 +10719,7 @@
           </a:ln>
           <a:extLst>
             <a:ext uri="{C572A759-6A51-4108-AA02-DFA0A04FC94B}">
-              <ma14:wrappingTextBoxFlag xmlns:ma14="http://schemas.microsoft.com/office/mac/drawingml/2011/main" xmlns="" val="1"/>
+              <ma14:wrappingTextBoxFlag xmlns="" xmlns:ma14="http://schemas.microsoft.com/office/mac/drawingml/2011/main" val="1"/>
             </a:ext>
           </a:extLst>
         </p:spPr>
@@ -10808,7 +10808,7 @@
           </a:ln>
           <a:extLst>
             <a:ext uri="{C572A759-6A51-4108-AA02-DFA0A04FC94B}">
-              <ma14:wrappingTextBoxFlag xmlns:ma14="http://schemas.microsoft.com/office/mac/drawingml/2011/main" xmlns="" val="1"/>
+              <ma14:wrappingTextBoxFlag xmlns="" xmlns:ma14="http://schemas.microsoft.com/office/mac/drawingml/2011/main" val="1"/>
             </a:ext>
           </a:extLst>
         </p:spPr>
@@ -10972,7 +10972,7 @@
           </a:ln>
           <a:extLst>
             <a:ext uri="{C572A759-6A51-4108-AA02-DFA0A04FC94B}">
-              <ma14:wrappingTextBoxFlag xmlns:ma14="http://schemas.microsoft.com/office/mac/drawingml/2011/main" xmlns="" val="1"/>
+              <ma14:wrappingTextBoxFlag xmlns="" xmlns:ma14="http://schemas.microsoft.com/office/mac/drawingml/2011/main" val="1"/>
             </a:ext>
           </a:extLst>
         </p:spPr>
@@ -11061,7 +11061,7 @@
           </a:ln>
           <a:extLst>
             <a:ext uri="{C572A759-6A51-4108-AA02-DFA0A04FC94B}">
-              <ma14:wrappingTextBoxFlag xmlns:ma14="http://schemas.microsoft.com/office/mac/drawingml/2011/main" xmlns="" val="1"/>
+              <ma14:wrappingTextBoxFlag xmlns="" xmlns:ma14="http://schemas.microsoft.com/office/mac/drawingml/2011/main" val="1"/>
             </a:ext>
           </a:extLst>
         </p:spPr>
@@ -11181,7 +11181,7 @@
           </a:ln>
           <a:extLst>
             <a:ext uri="{C572A759-6A51-4108-AA02-DFA0A04FC94B}">
-              <ma14:wrappingTextBoxFlag xmlns:ma14="http://schemas.microsoft.com/office/mac/drawingml/2011/main" xmlns="" val="1"/>
+              <ma14:wrappingTextBoxFlag xmlns="" xmlns:ma14="http://schemas.microsoft.com/office/mac/drawingml/2011/main" val="1"/>
             </a:ext>
           </a:extLst>
         </p:spPr>
@@ -11541,7 +11541,7 @@
           </a:ln>
           <a:extLst>
             <a:ext uri="{C572A759-6A51-4108-AA02-DFA0A04FC94B}">
-              <ma14:wrappingTextBoxFlag xmlns:ma14="http://schemas.microsoft.com/office/mac/drawingml/2011/main" xmlns="" val="1"/>
+              <ma14:wrappingTextBoxFlag xmlns="" xmlns:ma14="http://schemas.microsoft.com/office/mac/drawingml/2011/main" val="1"/>
             </a:ext>
           </a:extLst>
         </p:spPr>
@@ -11751,7 +11751,7 @@
           </a:ln>
           <a:extLst>
             <a:ext uri="{C572A759-6A51-4108-AA02-DFA0A04FC94B}">
-              <ma14:wrappingTextBoxFlag xmlns:ma14="http://schemas.microsoft.com/office/mac/drawingml/2011/main" xmlns="" val="1"/>
+              <ma14:wrappingTextBoxFlag xmlns="" xmlns:ma14="http://schemas.microsoft.com/office/mac/drawingml/2011/main" val="1"/>
             </a:ext>
           </a:extLst>
         </p:spPr>
@@ -11915,7 +11915,7 @@
           </a:ln>
           <a:extLst>
             <a:ext uri="{C572A759-6A51-4108-AA02-DFA0A04FC94B}">
-              <ma14:wrappingTextBoxFlag xmlns:ma14="http://schemas.microsoft.com/office/mac/drawingml/2011/main" xmlns="" val="1"/>
+              <ma14:wrappingTextBoxFlag xmlns="" xmlns:ma14="http://schemas.microsoft.com/office/mac/drawingml/2011/main" val="1"/>
             </a:ext>
           </a:extLst>
         </p:spPr>
@@ -12079,7 +12079,7 @@
           </a:ln>
           <a:extLst>
             <a:ext uri="{C572A759-6A51-4108-AA02-DFA0A04FC94B}">
-              <ma14:wrappingTextBoxFlag xmlns:ma14="http://schemas.microsoft.com/office/mac/drawingml/2011/main" xmlns="" val="1"/>
+              <ma14:wrappingTextBoxFlag xmlns="" xmlns:ma14="http://schemas.microsoft.com/office/mac/drawingml/2011/main" val="1"/>
             </a:ext>
           </a:extLst>
         </p:spPr>
@@ -12199,7 +12199,7 @@
           </a:ln>
           <a:extLst>
             <a:ext uri="{C572A759-6A51-4108-AA02-DFA0A04FC94B}">
-              <ma14:wrappingTextBoxFlag xmlns:ma14="http://schemas.microsoft.com/office/mac/drawingml/2011/main" xmlns="" val="1"/>
+              <ma14:wrappingTextBoxFlag xmlns="" xmlns:ma14="http://schemas.microsoft.com/office/mac/drawingml/2011/main" val="1"/>
             </a:ext>
           </a:extLst>
         </p:spPr>
@@ -12407,7 +12407,7 @@
           </a:ln>
           <a:extLst>
             <a:ext uri="{C572A759-6A51-4108-AA02-DFA0A04FC94B}">
-              <ma14:wrappingTextBoxFlag xmlns:ma14="http://schemas.microsoft.com/office/mac/drawingml/2011/main" xmlns="" val="1"/>
+              <ma14:wrappingTextBoxFlag xmlns="" xmlns:ma14="http://schemas.microsoft.com/office/mac/drawingml/2011/main" val="1"/>
             </a:ext>
           </a:extLst>
         </p:spPr>
@@ -12571,7 +12571,7 @@
           </a:ln>
           <a:extLst>
             <a:ext uri="{C572A759-6A51-4108-AA02-DFA0A04FC94B}">
-              <ma14:wrappingTextBoxFlag xmlns:ma14="http://schemas.microsoft.com/office/mac/drawingml/2011/main" xmlns="" val="1"/>
+              <ma14:wrappingTextBoxFlag xmlns="" xmlns:ma14="http://schemas.microsoft.com/office/mac/drawingml/2011/main" val="1"/>
             </a:ext>
           </a:extLst>
         </p:spPr>
@@ -12735,7 +12735,7 @@
           </a:ln>
           <a:extLst>
             <a:ext uri="{C572A759-6A51-4108-AA02-DFA0A04FC94B}">
-              <ma14:wrappingTextBoxFlag xmlns:ma14="http://schemas.microsoft.com/office/mac/drawingml/2011/main" xmlns="" val="1"/>
+              <ma14:wrappingTextBoxFlag xmlns="" xmlns:ma14="http://schemas.microsoft.com/office/mac/drawingml/2011/main" val="1"/>
             </a:ext>
           </a:extLst>
         </p:spPr>
@@ -12814,7 +12814,7 @@
             <a:fld id="{D1E336F5-B14A-4637-9064-F4D43A69DFE0}" type="datetimeFigureOut">
               <a:rPr lang="en-US" smtClean="0"/>
               <a:pPr/>
-              <a:t>2/13/2026</a:t>
+              <a:t>9/8/2026</a:t>
             </a:fld>
             <a:endParaRPr lang="en-US"/>
           </a:p>
@@ -13030,7 +13030,7 @@
           </a:ln>
           <a:extLst>
             <a:ext uri="{C572A759-6A51-4108-AA02-DFA0A04FC94B}">
-              <ma14:wrappingTextBoxFlag xmlns:ma14="http://schemas.microsoft.com/office/mac/drawingml/2011/main" xmlns="" val="1"/>
+              <ma14:wrappingTextBoxFlag xmlns="" xmlns:ma14="http://schemas.microsoft.com/office/mac/drawingml/2011/main" val="1"/>
             </a:ext>
           </a:extLst>
         </p:spPr>
@@ -13150,7 +13150,7 @@
           </a:ln>
           <a:extLst>
             <a:ext uri="{C572A759-6A51-4108-AA02-DFA0A04FC94B}">
-              <ma14:wrappingTextBoxFlag xmlns:ma14="http://schemas.microsoft.com/office/mac/drawingml/2011/main" xmlns="" val="1"/>
+              <ma14:wrappingTextBoxFlag xmlns="" xmlns:ma14="http://schemas.microsoft.com/office/mac/drawingml/2011/main" val="1"/>
             </a:ext>
           </a:extLst>
         </p:spPr>
@@ -13270,7 +13270,7 @@
           </a:ln>
           <a:extLst>
             <a:ext uri="{C572A759-6A51-4108-AA02-DFA0A04FC94B}">
-              <ma14:wrappingTextBoxFlag xmlns:ma14="http://schemas.microsoft.com/office/mac/drawingml/2011/main" xmlns="" val="1"/>
+              <ma14:wrappingTextBoxFlag xmlns="" xmlns:ma14="http://schemas.microsoft.com/office/mac/drawingml/2011/main" val="1"/>
             </a:ext>
           </a:extLst>
         </p:spPr>
@@ -13478,7 +13478,7 @@
           </a:ln>
           <a:extLst>
             <a:ext uri="{C572A759-6A51-4108-AA02-DFA0A04FC94B}">
-              <ma14:wrappingTextBoxFlag xmlns:ma14="http://schemas.microsoft.com/office/mac/drawingml/2011/main" xmlns="" val="1"/>
+              <ma14:wrappingTextBoxFlag xmlns="" xmlns:ma14="http://schemas.microsoft.com/office/mac/drawingml/2011/main" val="1"/>
             </a:ext>
           </a:extLst>
         </p:spPr>
@@ -13567,7 +13567,7 @@
           </a:ln>
           <a:extLst>
             <a:ext uri="{C572A759-6A51-4108-AA02-DFA0A04FC94B}">
-              <ma14:wrappingTextBoxFlag xmlns:ma14="http://schemas.microsoft.com/office/mac/drawingml/2011/main" xmlns="" val="1"/>
+              <ma14:wrappingTextBoxFlag xmlns="" xmlns:ma14="http://schemas.microsoft.com/office/mac/drawingml/2011/main" val="1"/>
             </a:ext>
           </a:extLst>
         </p:spPr>
@@ -13731,7 +13731,7 @@
           </a:ln>
           <a:extLst>
             <a:ext uri="{C572A759-6A51-4108-AA02-DFA0A04FC94B}">
-              <ma14:wrappingTextBoxFlag xmlns:ma14="http://schemas.microsoft.com/office/mac/drawingml/2011/main" xmlns="" val="1"/>
+              <ma14:wrappingTextBoxFlag xmlns="" xmlns:ma14="http://schemas.microsoft.com/office/mac/drawingml/2011/main" val="1"/>
             </a:ext>
           </a:extLst>
         </p:spPr>
@@ -13820,7 +13820,7 @@
           </a:ln>
           <a:extLst>
             <a:ext uri="{C572A759-6A51-4108-AA02-DFA0A04FC94B}">
-              <ma14:wrappingTextBoxFlag xmlns:ma14="http://schemas.microsoft.com/office/mac/drawingml/2011/main" xmlns="" val="1"/>
+              <ma14:wrappingTextBoxFlag xmlns="" xmlns:ma14="http://schemas.microsoft.com/office/mac/drawingml/2011/main" val="1"/>
             </a:ext>
           </a:extLst>
         </p:spPr>
@@ -13900,7 +13900,7 @@
           </a:ln>
           <a:extLst>
             <a:ext uri="{C572A759-6A51-4108-AA02-DFA0A04FC94B}">
-              <ma14:wrappingTextBoxFlag xmlns:ma14="http://schemas.microsoft.com/office/mac/drawingml/2011/main" xmlns="" val="1"/>
+              <ma14:wrappingTextBoxFlag xmlns="" xmlns:ma14="http://schemas.microsoft.com/office/mac/drawingml/2011/main" val="1"/>
             </a:ext>
           </a:extLst>
         </p:spPr>
@@ -13941,7 +13941,7 @@
           </a:ln>
           <a:extLst>
             <a:ext uri="{C572A759-6A51-4108-AA02-DFA0A04FC94B}">
-              <ma14:wrappingTextBoxFlag xmlns:ma14="http://schemas.microsoft.com/office/mac/drawingml/2011/main" xmlns="" val="1"/>
+              <ma14:wrappingTextBoxFlag xmlns="" xmlns:ma14="http://schemas.microsoft.com/office/mac/drawingml/2011/main" val="1"/>
             </a:ext>
           </a:extLst>
         </p:spPr>
@@ -15065,7 +15065,7 @@
           <p:nvPr/>
         </p:nvPicPr>
         <p:blipFill>
-          <a:blip r:embed="rId4">
+          <a:blip r:embed="rId4" cstate="print">
             <a:extLst>
               <a:ext uri="{28A0092B-C50C-407E-A947-70E740481C1C}">
                 <a14:useLocalDpi xmlns:a14="http://schemas.microsoft.com/office/drawing/2010/main" val="0"/>
@@ -15345,6 +15345,9 @@
                         <a14:foregroundMark x1="90090" y1="56388" x2="90090" y2="56388"/>
                       </a14:backgroundRemoval>
                     </a14:imgEffect>
+                    <a14:imgEffect>
+                      <a14:artisticBlur/>
+                    </a14:imgEffect>
                   </a14:imgLayer>
                 </a14:imgProps>
               </a:ext>
@@ -15418,7 +15421,7 @@
         <p:spPr>
           <a:xfrm>
             <a:off x="2175525" y="3527857"/>
-            <a:ext cx="20032949" cy="6660285"/>
+            <a:ext cx="20032949" cy="1734321"/>
           </a:xfrm>
           <a:prstGeom prst="rect">
             <a:avLst/>
@@ -15438,35 +15441,14 @@
                 </a:solidFill>
                 <a:latin typeface="Elena Basic Regular" panose="02000000000000000000" pitchFamily="50" charset="0"/>
               </a:rPr>
-              <a:t>"I have an </a:t>
+              <a:t>Feedback 1</a:t>
             </a:r>
-            <a:r>
-              <a:rPr lang="en-US" sz="10670" b="1" i="1" dirty="0">
-                <a:solidFill>
-                  <a:srgbClr val="A4CD3C"/>
-                </a:solidFill>
-                <a:latin typeface="Elena Basic"/>
-              </a:rPr>
-              <a:t>immediate direct application</a:t>
-            </a:r>
-            <a:r>
-              <a:rPr lang="en-US" sz="10670" dirty="0">
-                <a:solidFill>
-                  <a:srgbClr val="014C74"/>
-                </a:solidFill>
-                <a:latin typeface="Elena Basic Regular" panose="02000000000000000000" pitchFamily="50" charset="0"/>
-              </a:rPr>
-              <a:t> that I will take what I learned and immediately apply it </a:t>
-            </a:r>
-            <a:r>
-              <a:rPr lang="en-US" sz="10670" b="1" i="1" dirty="0">
-                <a:solidFill>
-                  <a:srgbClr val="A4CD3C"/>
-                </a:solidFill>
-                <a:latin typeface="Elena Basic"/>
-              </a:rPr>
-              <a:t>to a current contract negotiation."</a:t>
-            </a:r>
+            <a:endParaRPr lang="en-US" sz="10670" b="1" i="1" dirty="0">
+              <a:solidFill>
+                <a:srgbClr val="A4CD3C"/>
+              </a:solidFill>
+              <a:latin typeface="Elena Basic"/>
+            </a:endParaRPr>
           </a:p>
         </p:txBody>
       </p:sp>
@@ -15642,7 +15624,7 @@
         <p:spPr>
           <a:xfrm>
             <a:off x="1406892" y="3869118"/>
-            <a:ext cx="21570216" cy="4524315"/>
+            <a:ext cx="21570216" cy="1569660"/>
           </a:xfrm>
           <a:prstGeom prst="rect">
             <a:avLst/>
@@ -15662,17 +15644,14 @@
                 </a:solidFill>
                 <a:latin typeface="Elena Basic"/>
               </a:rPr>
-              <a:t>"Very good. I like the real-life examples </a:t>
+              <a:t>Feedback 2</a:t>
             </a:r>
-            <a:r>
-              <a:rPr lang="en-US" sz="9600" dirty="0">
-                <a:solidFill>
-                  <a:srgbClr val="014C74"/>
-                </a:solidFill>
-                <a:latin typeface="Elena Basic Regular" panose="02000000000000000000" pitchFamily="50" charset="0"/>
-              </a:rPr>
-              <a:t>and being able to work on our specific plans. That was very insightful."</a:t>
-            </a:r>
+            <a:endParaRPr lang="en-US" sz="9600" dirty="0">
+              <a:solidFill>
+                <a:srgbClr val="014C74"/>
+              </a:solidFill>
+              <a:latin typeface="Elena Basic Regular" panose="02000000000000000000" pitchFamily="50" charset="0"/>
+            </a:endParaRPr>
           </a:p>
         </p:txBody>
       </p:sp>
@@ -15848,7 +15827,7 @@
         <p:spPr>
           <a:xfrm>
             <a:off x="1844040" y="3672512"/>
-            <a:ext cx="20695920" cy="4801314"/>
+            <a:ext cx="20695920" cy="1661993"/>
           </a:xfrm>
           <a:prstGeom prst="rect">
             <a:avLst/>
@@ -15868,59 +15847,8 @@
                 </a:solidFill>
                 <a:latin typeface="Elena Basic"/>
               </a:rPr>
-              <a:t>"Training </a:t>
+              <a:t>Feedback 3</a:t>
             </a:r>
-            <a:r>
-              <a:rPr lang="en-US" sz="10200" dirty="0">
-                <a:solidFill>
-                  <a:srgbClr val="014C74"/>
-                </a:solidFill>
-                <a:latin typeface="Elena Basic Regular" panose="02000000000000000000" pitchFamily="50" charset="0"/>
-              </a:rPr>
-              <a:t>was </a:t>
-            </a:r>
-            <a:r>
-              <a:rPr lang="en-US" sz="10200" b="1" i="1" dirty="0">
-                <a:solidFill>
-                  <a:srgbClr val="A4CD3C"/>
-                </a:solidFill>
-                <a:latin typeface="Elena Basic"/>
-              </a:rPr>
-              <a:t>valuable</a:t>
-            </a:r>
-            <a:r>
-              <a:rPr lang="en-US" sz="10200" dirty="0">
-                <a:solidFill>
-                  <a:srgbClr val="014C74"/>
-                </a:solidFill>
-                <a:latin typeface="Elena Basic Regular" panose="02000000000000000000" pitchFamily="50" charset="0"/>
-              </a:rPr>
-              <a:t> and </a:t>
-            </a:r>
-            <a:r>
-              <a:rPr lang="en-US" sz="10200" b="1" i="1" dirty="0">
-                <a:solidFill>
-                  <a:srgbClr val="A4CD3C"/>
-                </a:solidFill>
-                <a:latin typeface="Elena Basic"/>
-              </a:rPr>
-              <a:t>thought provoking.</a:t>
-            </a:r>
-            <a:r>
-              <a:rPr lang="en-US" sz="10200" dirty="0">
-                <a:solidFill>
-                  <a:srgbClr val="014C74"/>
-                </a:solidFill>
-                <a:latin typeface="Elena Basic Regular" panose="02000000000000000000" pitchFamily="50" charset="0"/>
-              </a:rPr>
-              <a:t> I found it to be helpful and educational."</a:t>
-            </a:r>
-            <a:endParaRPr lang="en-US" sz="10200" b="1" i="1" dirty="0">
-              <a:solidFill>
-                <a:srgbClr val="A4CD3C"/>
-              </a:solidFill>
-              <a:latin typeface="Elena Basic"/>
-            </a:endParaRPr>
           </a:p>
         </p:txBody>
       </p:sp>
@@ -16096,7 +16024,7 @@
         <p:spPr>
           <a:xfrm>
             <a:off x="1871713" y="4780508"/>
-            <a:ext cx="20640574" cy="4154984"/>
+            <a:ext cx="20640574" cy="1446550"/>
           </a:xfrm>
           <a:prstGeom prst="rect">
             <a:avLst/>
@@ -16116,17 +16044,14 @@
                 </a:solidFill>
                 <a:latin typeface="Elena Basic"/>
               </a:rPr>
-              <a:t>"Great instructor, very engaging and relatable in discussions. </a:t>
+              <a:t>Feedback 4</a:t>
             </a:r>
-            <a:r>
-              <a:rPr lang="en-US" sz="8800" dirty="0">
-                <a:solidFill>
-                  <a:srgbClr val="014C74"/>
-                </a:solidFill>
-                <a:latin typeface="Elena Basic Regular" panose="02000000000000000000" pitchFamily="50" charset="0"/>
-              </a:rPr>
-              <a:t>Learned stronger negotiating skills and how to react."</a:t>
-            </a:r>
+            <a:endParaRPr lang="en-US" sz="8800" dirty="0">
+              <a:solidFill>
+                <a:srgbClr val="014C74"/>
+              </a:solidFill>
+              <a:latin typeface="Elena Basic Regular" panose="02000000000000000000" pitchFamily="50" charset="0"/>
+            </a:endParaRPr>
           </a:p>
         </p:txBody>
       </p:sp>
@@ -16342,7 +16267,7 @@
                   </a:solidFill>
                   <a:latin typeface="Elena Basic Regular" panose="02000000000000000000"/>
                 </a:rPr>
-                <a:t>4.91</a:t>
+                <a:t>%</a:t>
               </a:r>
             </a:p>
           </p:txBody>
@@ -16492,7 +16417,7 @@
                   </a:solidFill>
                   <a:latin typeface="Elena Basic Regular" panose="02000000000000000000"/>
                 </a:rPr>
-                <a:t>5.55</a:t>
+                <a:t>%</a:t>
               </a:r>
             </a:p>
           </p:txBody>
@@ -16642,7 +16567,7 @@
                   </a:solidFill>
                   <a:latin typeface="Elena Basic Regular" panose="02000000000000000000"/>
                 </a:rPr>
-                <a:t>4.36</a:t>
+                <a:t>%</a:t>
               </a:r>
             </a:p>
           </p:txBody>
@@ -16751,10 +16676,10 @@
         </p:nvGrpSpPr>
         <p:grpSpPr>
           <a:xfrm>
-            <a:off x="12570592" y="7444567"/>
-            <a:ext cx="10714693" cy="5130337"/>
+            <a:off x="12570592" y="7444568"/>
+            <a:ext cx="10714693" cy="2637348"/>
             <a:chOff x="9412176" y="6350168"/>
-            <a:chExt cx="8036020" cy="3847753"/>
+            <a:chExt cx="8036020" cy="1978011"/>
           </a:xfrm>
         </p:grpSpPr>
         <p:sp>
@@ -16772,7 +16697,7 @@
           <p:spPr>
             <a:xfrm>
               <a:off x="9412176" y="7635681"/>
-              <a:ext cx="8036020" cy="2562240"/>
+              <a:ext cx="8036020" cy="692498"/>
             </a:xfrm>
             <a:prstGeom prst="rect">
               <a:avLst/>
@@ -16795,59 +16720,8 @@
                   </a:solidFill>
                   <a:latin typeface="Elena Basic Regular" panose="02000000000000000000"/>
                 </a:rPr>
-                <a:t>Body language;</a:t>
+                <a:t>Comments</a:t>
               </a:r>
-            </a:p>
-            <a:p>
-              <a:r>
-                <a:rPr lang="en-US" sz="5400" dirty="0">
-                  <a:solidFill>
-                    <a:schemeClr val="tx1">
-                      <a:lumMod val="75000"/>
-                      <a:lumOff val="25000"/>
-                    </a:schemeClr>
-                  </a:solidFill>
-                  <a:latin typeface="Elena Basic Regular" panose="02000000000000000000"/>
-                </a:rPr>
-                <a:t>Time crunching negotiations;</a:t>
-              </a:r>
-            </a:p>
-            <a:p>
-              <a:r>
-                <a:rPr lang="en-US" sz="5400" dirty="0">
-                  <a:solidFill>
-                    <a:schemeClr val="tx1">
-                      <a:lumMod val="75000"/>
-                      <a:lumOff val="25000"/>
-                    </a:schemeClr>
-                  </a:solidFill>
-                  <a:latin typeface="Elena Basic Regular" panose="02000000000000000000"/>
-                </a:rPr>
-                <a:t>Quick-action situations;</a:t>
-              </a:r>
-            </a:p>
-            <a:p>
-              <a:r>
-                <a:rPr lang="en-US" sz="5400">
-                  <a:solidFill>
-                    <a:schemeClr val="tx1">
-                      <a:lumMod val="75000"/>
-                      <a:lumOff val="25000"/>
-                    </a:schemeClr>
-                  </a:solidFill>
-                  <a:latin typeface="Elena Basic Regular" panose="02000000000000000000"/>
-                </a:rPr>
-                <a:t>Repeatable negotiations.</a:t>
-              </a:r>
-              <a:endParaRPr lang="en-US" sz="5400" dirty="0">
-                <a:solidFill>
-                  <a:schemeClr val="tx1">
-                    <a:lumMod val="75000"/>
-                    <a:lumOff val="25000"/>
-                  </a:schemeClr>
-                </a:solidFill>
-                <a:latin typeface="Elena Basic Regular" panose="02000000000000000000"/>
-              </a:endParaRPr>
             </a:p>
           </p:txBody>
         </p:sp>
@@ -20058,15 +19932,6 @@
 </file>
 
 <file path=customXml/item2.xml><?xml version="1.0" encoding="utf-8"?>
-<?mso-contentType ?>
-<FormTemplates xmlns="http://schemas.microsoft.com/sharepoint/v3/contenttype/forms">
-  <Display>DocumentLibraryForm</Display>
-  <Edit>DocumentLibraryForm</Edit>
-  <New>DocumentLibraryForm</New>
-</FormTemplates>
-</file>
-
-<file path=customXml/item3.xml><?xml version="1.0" encoding="utf-8"?>
 <p:properties xmlns:p="http://schemas.microsoft.com/office/2006/metadata/properties" xmlns:xsi="http://www.w3.org/2001/XMLSchema-instance" xmlns:pc="http://schemas.microsoft.com/office/infopath/2007/PartnerControls">
   <documentManagement>
     <lcf76f155ced4ddcb4097134ff3c332f xmlns="41848976-3cbc-4564-b60e-30bb06cf4034">
@@ -20075,6 +19940,15 @@
     <TaxCatchAll xmlns="cd59b78c-2f23-490c-bce5-81b106bd2444" xsi:nil="true"/>
   </documentManagement>
 </p:properties>
+</file>
+
+<file path=customXml/item3.xml><?xml version="1.0" encoding="utf-8"?>
+<?mso-contentType ?>
+<FormTemplates xmlns="http://schemas.microsoft.com/sharepoint/v3/contenttype/forms">
+  <Display>DocumentLibraryForm</Display>
+  <Edit>DocumentLibraryForm</Edit>
+  <New>DocumentLibraryForm</New>
+</FormTemplates>
 </file>
 
 <file path=customXml/itemProps1.xml><?xml version="1.0" encoding="utf-8"?>
@@ -20097,14 +19971,6 @@
 </file>
 
 <file path=customXml/itemProps2.xml><?xml version="1.0" encoding="utf-8"?>
-<ds:datastoreItem xmlns:ds="http://schemas.openxmlformats.org/officeDocument/2006/customXml" ds:itemID="{0E44175E-8EF1-4F14-9FA1-9DC1DD8CF686}">
-  <ds:schemaRefs>
-    <ds:schemaRef ds:uri="http://schemas.microsoft.com/sharepoint/v3/contenttype/forms"/>
-  </ds:schemaRefs>
-</ds:datastoreItem>
-</file>
-
-<file path=customXml/itemProps3.xml><?xml version="1.0" encoding="utf-8"?>
 <ds:datastoreItem xmlns:ds="http://schemas.openxmlformats.org/officeDocument/2006/customXml" ds:itemID="{7CBAF0E2-AAA8-460F-8675-197462836749}">
   <ds:schemaRefs>
     <ds:schemaRef ds:uri="http://schemas.microsoft.com/office/2006/metadata/properties"/>
@@ -20121,6 +19987,14 @@
 </ds:datastoreItem>
 </file>
 
+<file path=customXml/itemProps3.xml><?xml version="1.0" encoding="utf-8"?>
+<ds:datastoreItem xmlns:ds="http://schemas.openxmlformats.org/officeDocument/2006/customXml" ds:itemID="{0E44175E-8EF1-4F14-9FA1-9DC1DD8CF686}">
+  <ds:schemaRefs>
+    <ds:schemaRef ds:uri="http://schemas.microsoft.com/sharepoint/v3/contenttype/forms"/>
+  </ds:schemaRefs>
+</ds:datastoreItem>
+</file>
+
 <file path=docMetadata/LabelInfo.xml><?xml version="1.0" encoding="utf-8"?>
 <clbl:labelList xmlns:clbl="http://schemas.microsoft.com/office/2020/mipLabelMetadata">
   <clbl:label id="{2216f011-2e3d-4e2d-bb08-8a7bad82bfe8}" enabled="0" method="" siteId="{2216f011-2e3d-4e2d-bb08-8a7bad82bfe8}" removed="1"/>
